--- a/docs/research/infra-intelligence-skill-audit-direction.pptx
+++ b/docs/research/infra-intelligence-skill-audit-direction.pptx
@@ -19,6 +19,7 @@
     <p:sldId xmlns:r="http://schemas.openxmlformats.org/officeDocument/2006/relationships" id="264" r:id="R416bac008fe74766"/>
     <p:sldId xmlns:r="http://schemas.openxmlformats.org/officeDocument/2006/relationships" id="265" r:id="Rfd9a9224595d4946"/>
     <p:sldId xmlns:r="http://schemas.openxmlformats.org/officeDocument/2006/relationships" id="266" r:id="Rd48c0bcffc124f5b"/>
+    <p:sldId xmlns:ns0="http://schemas.openxmlformats.org/officeDocument/2006/relationships" id="267" ns0:id="rId18"/>
   </p:sldIdLst>
   <p:sldSz cx="12192000" cy="6858000"/>
   <p:notesSz cx="6858000" cy="9144000"/>
@@ -6167,6 +6168,1256 @@
 </p:sld>
 </file>
 
+<file path=ppt/slides/slide12.xml><?xml version="1.0" encoding="utf-8"?>
+<p:sld xmlns:a="http://schemas.openxmlformats.org/drawingml/2006/main" xmlns:p="http://schemas.openxmlformats.org/presentationml/2006/main" xmlns:r="http://schemas.openxmlformats.org/officeDocument/2006/relationships">
+  <p:cSld>
+    <p:spTree>
+      <p:nvGrpSpPr>
+        <p:cNvPr id="1" name=""/>
+        <p:cNvGrpSpPr/>
+        <p:nvPr/>
+      </p:nvGrpSpPr>
+      <p:grpSpPr/>
+      <p:sp>
+        <p:nvSpPr>
+          <p:cNvPr id="2" name="Rectangle 1"/>
+          <p:cNvSpPr/>
+          <p:nvPr/>
+        </p:nvSpPr>
+        <p:spPr>
+          <a:xfrm>
+            <a:off x="0" y="0"/>
+            <a:ext cx="12192000" cy="6858000"/>
+          </a:xfrm>
+          <a:prstGeom prst="rect">
+            <a:avLst/>
+          </a:prstGeom>
+          <a:solidFill>
+            <a:srgbClr val="F7F3EA"/>
+          </a:solidFill>
+          <a:ln>
+            <a:solidFill>
+              <a:srgbClr val="F7F3EA"/>
+            </a:solidFill>
+          </a:ln>
+        </p:spPr>
+        <p:style>
+          <a:lnRef idx="1">
+            <a:schemeClr val="accent1"/>
+          </a:lnRef>
+          <a:fillRef idx="3">
+            <a:schemeClr val="accent1"/>
+          </a:fillRef>
+          <a:effectRef idx="2">
+            <a:schemeClr val="accent1"/>
+          </a:effectRef>
+          <a:fontRef idx="minor">
+            <a:schemeClr val="lt1"/>
+          </a:fontRef>
+        </p:style>
+        <p:txBody>
+          <a:bodyPr rtlCol="0" anchor="ctr"/>
+          <a:lstStyle/>
+          <a:p>
+            <a:pPr algn="ctr"/>
+          </a:p>
+        </p:txBody>
+      </p:sp>
+      <p:sp>
+        <p:nvSpPr>
+          <p:cNvPr id="3" name="Rectangle 2"/>
+          <p:cNvSpPr/>
+          <p:nvPr/>
+        </p:nvSpPr>
+        <p:spPr>
+          <a:xfrm>
+            <a:off x="0" y="0"/>
+            <a:ext cx="12192000" cy="438912"/>
+          </a:xfrm>
+          <a:prstGeom prst="rect">
+            <a:avLst/>
+          </a:prstGeom>
+          <a:solidFill>
+            <a:srgbClr val="111827"/>
+          </a:solidFill>
+          <a:ln>
+            <a:solidFill>
+              <a:srgbClr val="111827"/>
+            </a:solidFill>
+          </a:ln>
+        </p:spPr>
+        <p:style>
+          <a:lnRef idx="1">
+            <a:schemeClr val="accent1"/>
+          </a:lnRef>
+          <a:fillRef idx="3">
+            <a:schemeClr val="accent1"/>
+          </a:fillRef>
+          <a:effectRef idx="2">
+            <a:schemeClr val="accent1"/>
+          </a:effectRef>
+          <a:fontRef idx="minor">
+            <a:schemeClr val="lt1"/>
+          </a:fontRef>
+        </p:style>
+        <p:txBody>
+          <a:bodyPr rtlCol="0" anchor="ctr"/>
+          <a:lstStyle/>
+          <a:p>
+            <a:pPr algn="ctr"/>
+          </a:p>
+        </p:txBody>
+      </p:sp>
+      <p:sp>
+        <p:nvSpPr>
+          <p:cNvPr id="4" name="TextBox 3"/>
+          <p:cNvSpPr txBox="1"/>
+          <p:nvPr/>
+        </p:nvSpPr>
+        <p:spPr>
+          <a:xfrm>
+            <a:off x="530352" y="137160"/>
+            <a:ext cx="5029200" cy="182880"/>
+          </a:xfrm>
+          <a:prstGeom prst="rect">
+            <a:avLst/>
+          </a:prstGeom>
+          <a:noFill/>
+        </p:spPr>
+        <p:txBody>
+          <a:bodyPr wrap="none">
+            <a:spAutoFit/>
+          </a:bodyPr>
+          <a:lstStyle/>
+          <a:p>
+            <a:r>
+              <a:rPr sz="800" b="1">
+                <a:solidFill>
+                  <a:srgbClr val="D1D5DB"/>
+                </a:solidFill>
+                <a:latin typeface="PingFang SC"/>
+              </a:rPr>
+              <a:t>Infra Intelligence / Siclaw Research</a:t>
+            </a:r>
+          </a:p>
+        </p:txBody>
+      </p:sp>
+      <p:sp>
+        <p:nvSpPr>
+          <p:cNvPr id="5" name="TextBox 4"/>
+          <p:cNvSpPr txBox="1"/>
+          <p:nvPr/>
+        </p:nvSpPr>
+        <p:spPr>
+          <a:xfrm>
+            <a:off x="11155680" y="109728"/>
+            <a:ext cx="365760" cy="228600"/>
+          </a:xfrm>
+          <a:prstGeom prst="rect">
+            <a:avLst/>
+          </a:prstGeom>
+          <a:noFill/>
+        </p:spPr>
+        <p:txBody>
+          <a:bodyPr wrap="none">
+            <a:spAutoFit/>
+          </a:bodyPr>
+          <a:lstStyle/>
+          <a:p>
+            <a:r>
+              <a:rPr sz="1000" b="1">
+                <a:solidFill>
+                  <a:srgbClr val="F9FAFB"/>
+                </a:solidFill>
+                <a:latin typeface="Menlo"/>
+              </a:rPr>
+              <a:t>12</a:t>
+            </a:r>
+          </a:p>
+        </p:txBody>
+      </p:sp>
+      <p:sp>
+        <p:nvSpPr>
+          <p:cNvPr id="6" name="Rectangle 5"/>
+          <p:cNvSpPr/>
+          <p:nvPr/>
+        </p:nvSpPr>
+        <p:spPr>
+          <a:xfrm>
+            <a:off x="621792" y="813816"/>
+            <a:ext cx="274320" cy="27432"/>
+          </a:xfrm>
+          <a:prstGeom prst="rect">
+            <a:avLst/>
+          </a:prstGeom>
+          <a:solidFill>
+            <a:srgbClr val="2563EB"/>
+          </a:solidFill>
+          <a:ln>
+            <a:solidFill>
+              <a:srgbClr val="2563EB"/>
+            </a:solidFill>
+          </a:ln>
+        </p:spPr>
+        <p:style>
+          <a:lnRef idx="1">
+            <a:schemeClr val="accent1"/>
+          </a:lnRef>
+          <a:fillRef idx="3">
+            <a:schemeClr val="accent1"/>
+          </a:fillRef>
+          <a:effectRef idx="2">
+            <a:schemeClr val="accent1"/>
+          </a:effectRef>
+          <a:fontRef idx="minor">
+            <a:schemeClr val="lt1"/>
+          </a:fontRef>
+        </p:style>
+        <p:txBody>
+          <a:bodyPr rtlCol="0" anchor="ctr"/>
+          <a:lstStyle/>
+          <a:p>
+            <a:pPr algn="ctr"/>
+          </a:p>
+        </p:txBody>
+      </p:sp>
+      <p:sp>
+        <p:nvSpPr>
+          <p:cNvPr id="7" name="TextBox 6"/>
+          <p:cNvSpPr txBox="1"/>
+          <p:nvPr/>
+        </p:nvSpPr>
+        <p:spPr>
+          <a:xfrm>
+            <a:off x="978408" y="731520"/>
+            <a:ext cx="2286000" cy="228600"/>
+          </a:xfrm>
+          <a:prstGeom prst="rect">
+            <a:avLst/>
+          </a:prstGeom>
+          <a:noFill/>
+        </p:spPr>
+        <p:txBody>
+          <a:bodyPr wrap="none">
+            <a:spAutoFit/>
+          </a:bodyPr>
+          <a:lstStyle/>
+          <a:p>
+            <a:r>
+              <a:rPr sz="800" b="1">
+                <a:solidFill>
+                  <a:srgbClr val="64748B"/>
+                </a:solidFill>
+                <a:latin typeface="PingFang SC"/>
+              </a:rPr>
+              <a:t>REFERENCES</a:t>
+            </a:r>
+          </a:p>
+        </p:txBody>
+      </p:sp>
+      <p:sp>
+        <p:nvSpPr>
+          <p:cNvPr id="8" name="TextBox 7"/>
+          <p:cNvSpPr txBox="1"/>
+          <p:nvPr/>
+        </p:nvSpPr>
+        <p:spPr>
+          <a:xfrm>
+            <a:off x="621792" y="1060704"/>
+            <a:ext cx="6583680" cy="457200"/>
+          </a:xfrm>
+          <a:prstGeom prst="rect">
+            <a:avLst/>
+          </a:prstGeom>
+          <a:noFill/>
+        </p:spPr>
+        <p:txBody>
+          <a:bodyPr wrap="none">
+            <a:spAutoFit/>
+          </a:bodyPr>
+          <a:lstStyle/>
+          <a:p>
+            <a:r>
+              <a:rPr sz="2700" b="1">
+                <a:solidFill>
+                  <a:srgbClr val="111827"/>
+                </a:solidFill>
+                <a:latin typeface="PingFang SC"/>
+              </a:rPr>
+              <a:t>论文与项目参考</a:t>
+            </a:r>
+          </a:p>
+        </p:txBody>
+      </p:sp>
+      <p:sp>
+        <p:nvSpPr>
+          <p:cNvPr id="9" name="Rectangle 8"/>
+          <p:cNvSpPr/>
+          <p:nvPr/>
+        </p:nvSpPr>
+        <p:spPr>
+          <a:xfrm>
+            <a:off x="768096" y="1865376"/>
+            <a:ext cx="109728" cy="109728"/>
+          </a:xfrm>
+          <a:prstGeom prst="rect">
+            <a:avLst/>
+          </a:prstGeom>
+          <a:solidFill>
+            <a:srgbClr val="2563EB"/>
+          </a:solidFill>
+          <a:ln>
+            <a:solidFill>
+              <a:srgbClr val="2563EB"/>
+            </a:solidFill>
+          </a:ln>
+        </p:spPr>
+        <p:style>
+          <a:lnRef idx="1">
+            <a:schemeClr val="accent1"/>
+          </a:lnRef>
+          <a:fillRef idx="3">
+            <a:schemeClr val="accent1"/>
+          </a:fillRef>
+          <a:effectRef idx="2">
+            <a:schemeClr val="accent1"/>
+          </a:effectRef>
+          <a:fontRef idx="minor">
+            <a:schemeClr val="lt1"/>
+          </a:fontRef>
+        </p:style>
+        <p:txBody>
+          <a:bodyPr rtlCol="0" anchor="ctr"/>
+          <a:lstStyle/>
+          <a:p>
+            <a:pPr algn="ctr"/>
+          </a:p>
+        </p:txBody>
+      </p:sp>
+      <p:sp>
+        <p:nvSpPr>
+          <p:cNvPr id="10" name="TextBox 9"/>
+          <p:cNvSpPr txBox="1"/>
+          <p:nvPr/>
+        </p:nvSpPr>
+        <p:spPr>
+          <a:xfrm>
+            <a:off x="1051560" y="1810512"/>
+            <a:ext cx="1463040" cy="228600"/>
+          </a:xfrm>
+          <a:prstGeom prst="rect">
+            <a:avLst/>
+          </a:prstGeom>
+          <a:noFill/>
+        </p:spPr>
+        <p:txBody>
+          <a:bodyPr wrap="none">
+            <a:spAutoFit/>
+          </a:bodyPr>
+          <a:lstStyle/>
+          <a:p>
+            <a:r>
+              <a:rPr sz="1300" b="1">
+                <a:solidFill>
+                  <a:srgbClr val="2563EB"/>
+                </a:solidFill>
+                <a:latin typeface="PingFang SC"/>
+              </a:rPr>
+              <a:t>SkillRL</a:t>
+            </a:r>
+          </a:p>
+        </p:txBody>
+      </p:sp>
+      <p:sp>
+        <p:nvSpPr>
+          <p:cNvPr id="11" name="TextBox 10"/>
+          <p:cNvSpPr txBox="1"/>
+          <p:nvPr/>
+        </p:nvSpPr>
+        <p:spPr>
+          <a:xfrm>
+            <a:off x="2468880" y="1810512"/>
+            <a:ext cx="5029200" cy="228600"/>
+          </a:xfrm>
+          <a:prstGeom prst="rect">
+            <a:avLst/>
+          </a:prstGeom>
+          <a:noFill/>
+        </p:spPr>
+        <p:txBody>
+          <a:bodyPr wrap="none">
+            <a:spAutoFit/>
+          </a:bodyPr>
+          <a:lstStyle/>
+          <a:p>
+            <a:r>
+              <a:rPr sz="1050" b="0">
+                <a:solidFill>
+                  <a:srgbClr val="334155"/>
+                </a:solidFill>
+                <a:latin typeface="PingFang SC"/>
+              </a:rPr>
+              <a:t>Evolving Agents via Recursive Skill-Augmented Reinforcement Learning</a:t>
+            </a:r>
+          </a:p>
+        </p:txBody>
+      </p:sp>
+      <p:sp>
+        <p:nvSpPr>
+          <p:cNvPr id="12" name="TextBox 11"/>
+          <p:cNvSpPr txBox="1"/>
+          <p:nvPr/>
+        </p:nvSpPr>
+        <p:spPr>
+          <a:xfrm>
+            <a:off x="7543800" y="1810512"/>
+            <a:ext cx="3749039" cy="228600"/>
+          </a:xfrm>
+          <a:prstGeom prst="rect">
+            <a:avLst/>
+          </a:prstGeom>
+          <a:noFill/>
+        </p:spPr>
+        <p:txBody>
+          <a:bodyPr wrap="none">
+            <a:spAutoFit/>
+          </a:bodyPr>
+          <a:lstStyle/>
+          <a:p>
+            <a:r>
+              <a:rPr sz="880" b="0">
+                <a:solidFill>
+                  <a:srgbClr val="2563EB"/>
+                </a:solidFill>
+                <a:latin typeface="Menlo"/>
+              </a:rPr>
+              <a:t>https://arxiv.org/abs/2602.08234</a:t>
+            </a:r>
+          </a:p>
+        </p:txBody>
+      </p:sp>
+      <p:sp>
+        <p:nvSpPr>
+          <p:cNvPr id="13" name="Rectangle 12"/>
+          <p:cNvSpPr/>
+          <p:nvPr/>
+        </p:nvSpPr>
+        <p:spPr>
+          <a:xfrm>
+            <a:off x="768096" y="2478024"/>
+            <a:ext cx="109728" cy="109728"/>
+          </a:xfrm>
+          <a:prstGeom prst="rect">
+            <a:avLst/>
+          </a:prstGeom>
+          <a:solidFill>
+            <a:srgbClr val="059669"/>
+          </a:solidFill>
+          <a:ln>
+            <a:solidFill>
+              <a:srgbClr val="059669"/>
+            </a:solidFill>
+          </a:ln>
+        </p:spPr>
+        <p:style>
+          <a:lnRef idx="1">
+            <a:schemeClr val="accent1"/>
+          </a:lnRef>
+          <a:fillRef idx="3">
+            <a:schemeClr val="accent1"/>
+          </a:fillRef>
+          <a:effectRef idx="2">
+            <a:schemeClr val="accent1"/>
+          </a:effectRef>
+          <a:fontRef idx="minor">
+            <a:schemeClr val="lt1"/>
+          </a:fontRef>
+        </p:style>
+        <p:txBody>
+          <a:bodyPr rtlCol="0" anchor="ctr"/>
+          <a:lstStyle/>
+          <a:p>
+            <a:pPr algn="ctr"/>
+          </a:p>
+        </p:txBody>
+      </p:sp>
+      <p:sp>
+        <p:nvSpPr>
+          <p:cNvPr id="14" name="TextBox 13"/>
+          <p:cNvSpPr txBox="1"/>
+          <p:nvPr/>
+        </p:nvSpPr>
+        <p:spPr>
+          <a:xfrm>
+            <a:off x="1051560" y="2423160"/>
+            <a:ext cx="1463040" cy="228600"/>
+          </a:xfrm>
+          <a:prstGeom prst="rect">
+            <a:avLst/>
+          </a:prstGeom>
+          <a:noFill/>
+        </p:spPr>
+        <p:txBody>
+          <a:bodyPr wrap="none">
+            <a:spAutoFit/>
+          </a:bodyPr>
+          <a:lstStyle/>
+          <a:p>
+            <a:r>
+              <a:rPr sz="1300" b="1">
+                <a:solidFill>
+                  <a:srgbClr val="059669"/>
+                </a:solidFill>
+                <a:latin typeface="PingFang SC"/>
+              </a:rPr>
+              <a:t>SkillRouter</a:t>
+            </a:r>
+          </a:p>
+        </p:txBody>
+      </p:sp>
+      <p:sp>
+        <p:nvSpPr>
+          <p:cNvPr id="15" name="TextBox 14"/>
+          <p:cNvSpPr txBox="1"/>
+          <p:nvPr/>
+        </p:nvSpPr>
+        <p:spPr>
+          <a:xfrm>
+            <a:off x="2468880" y="2423160"/>
+            <a:ext cx="5029200" cy="228600"/>
+          </a:xfrm>
+          <a:prstGeom prst="rect">
+            <a:avLst/>
+          </a:prstGeom>
+          <a:noFill/>
+        </p:spPr>
+        <p:txBody>
+          <a:bodyPr wrap="none">
+            <a:spAutoFit/>
+          </a:bodyPr>
+          <a:lstStyle/>
+          <a:p>
+            <a:r>
+              <a:rPr sz="1050" b="0">
+                <a:solidFill>
+                  <a:srgbClr val="334155"/>
+                </a:solidFill>
+                <a:latin typeface="PingFang SC"/>
+              </a:rPr>
+              <a:t>Skill Routing for LLM Agents at Scale</a:t>
+            </a:r>
+          </a:p>
+        </p:txBody>
+      </p:sp>
+      <p:sp>
+        <p:nvSpPr>
+          <p:cNvPr id="16" name="TextBox 15"/>
+          <p:cNvSpPr txBox="1"/>
+          <p:nvPr/>
+        </p:nvSpPr>
+        <p:spPr>
+          <a:xfrm>
+            <a:off x="7543800" y="2423160"/>
+            <a:ext cx="3749039" cy="228600"/>
+          </a:xfrm>
+          <a:prstGeom prst="rect">
+            <a:avLst/>
+          </a:prstGeom>
+          <a:noFill/>
+        </p:spPr>
+        <p:txBody>
+          <a:bodyPr wrap="none">
+            <a:spAutoFit/>
+          </a:bodyPr>
+          <a:lstStyle/>
+          <a:p>
+            <a:r>
+              <a:rPr sz="880" b="0">
+                <a:solidFill>
+                  <a:srgbClr val="2563EB"/>
+                </a:solidFill>
+                <a:latin typeface="Menlo"/>
+              </a:rPr>
+              <a:t>https://arxiv.org/abs/2603.22455</a:t>
+            </a:r>
+          </a:p>
+        </p:txBody>
+      </p:sp>
+      <p:sp>
+        <p:nvSpPr>
+          <p:cNvPr id="17" name="Rectangle 16"/>
+          <p:cNvSpPr/>
+          <p:nvPr/>
+        </p:nvSpPr>
+        <p:spPr>
+          <a:xfrm>
+            <a:off x="768096" y="3090672"/>
+            <a:ext cx="109728" cy="109728"/>
+          </a:xfrm>
+          <a:prstGeom prst="rect">
+            <a:avLst/>
+          </a:prstGeom>
+          <a:solidFill>
+            <a:srgbClr val="B7791F"/>
+          </a:solidFill>
+          <a:ln>
+            <a:solidFill>
+              <a:srgbClr val="B7791F"/>
+            </a:solidFill>
+          </a:ln>
+        </p:spPr>
+        <p:style>
+          <a:lnRef idx="1">
+            <a:schemeClr val="accent1"/>
+          </a:lnRef>
+          <a:fillRef idx="3">
+            <a:schemeClr val="accent1"/>
+          </a:fillRef>
+          <a:effectRef idx="2">
+            <a:schemeClr val="accent1"/>
+          </a:effectRef>
+          <a:fontRef idx="minor">
+            <a:schemeClr val="lt1"/>
+          </a:fontRef>
+        </p:style>
+        <p:txBody>
+          <a:bodyPr rtlCol="0" anchor="ctr"/>
+          <a:lstStyle/>
+          <a:p>
+            <a:pPr algn="ctr"/>
+          </a:p>
+        </p:txBody>
+      </p:sp>
+      <p:sp>
+        <p:nvSpPr>
+          <p:cNvPr id="18" name="TextBox 17"/>
+          <p:cNvSpPr txBox="1"/>
+          <p:nvPr/>
+        </p:nvSpPr>
+        <p:spPr>
+          <a:xfrm>
+            <a:off x="1051560" y="3035808"/>
+            <a:ext cx="1463040" cy="228600"/>
+          </a:xfrm>
+          <a:prstGeom prst="rect">
+            <a:avLst/>
+          </a:prstGeom>
+          <a:noFill/>
+        </p:spPr>
+        <p:txBody>
+          <a:bodyPr wrap="none">
+            <a:spAutoFit/>
+          </a:bodyPr>
+          <a:lstStyle/>
+          <a:p>
+            <a:r>
+              <a:rPr sz="1300" b="1">
+                <a:solidFill>
+                  <a:srgbClr val="B7791F"/>
+                </a:solidFill>
+                <a:latin typeface="PingFang SC"/>
+              </a:rPr>
+              <a:t>SkillFlow</a:t>
+            </a:r>
+          </a:p>
+        </p:txBody>
+      </p:sp>
+      <p:sp>
+        <p:nvSpPr>
+          <p:cNvPr id="19" name="TextBox 18"/>
+          <p:cNvSpPr txBox="1"/>
+          <p:nvPr/>
+        </p:nvSpPr>
+        <p:spPr>
+          <a:xfrm>
+            <a:off x="2468880" y="3035808"/>
+            <a:ext cx="5029200" cy="228600"/>
+          </a:xfrm>
+          <a:prstGeom prst="rect">
+            <a:avLst/>
+          </a:prstGeom>
+          <a:noFill/>
+        </p:spPr>
+        <p:txBody>
+          <a:bodyPr wrap="none">
+            <a:spAutoFit/>
+          </a:bodyPr>
+          <a:lstStyle/>
+          <a:p>
+            <a:r>
+              <a:rPr sz="1050" b="0">
+                <a:solidFill>
+                  <a:srgbClr val="334155"/>
+                </a:solidFill>
+                <a:latin typeface="PingFang SC"/>
+              </a:rPr>
+              <a:t>Benchmarking Lifelong Skill Discovery and Evolution for Autonomous Agents</a:t>
+            </a:r>
+          </a:p>
+        </p:txBody>
+      </p:sp>
+      <p:sp>
+        <p:nvSpPr>
+          <p:cNvPr id="20" name="TextBox 19"/>
+          <p:cNvSpPr txBox="1"/>
+          <p:nvPr/>
+        </p:nvSpPr>
+        <p:spPr>
+          <a:xfrm>
+            <a:off x="7543800" y="3035808"/>
+            <a:ext cx="3749039" cy="228600"/>
+          </a:xfrm>
+          <a:prstGeom prst="rect">
+            <a:avLst/>
+          </a:prstGeom>
+          <a:noFill/>
+        </p:spPr>
+        <p:txBody>
+          <a:bodyPr wrap="none">
+            <a:spAutoFit/>
+          </a:bodyPr>
+          <a:lstStyle/>
+          <a:p>
+            <a:r>
+              <a:rPr sz="880" b="0">
+                <a:solidFill>
+                  <a:srgbClr val="2563EB"/>
+                </a:solidFill>
+                <a:latin typeface="Menlo"/>
+              </a:rPr>
+              <a:t>https://arxiv.org/abs/2604.17308</a:t>
+            </a:r>
+          </a:p>
+        </p:txBody>
+      </p:sp>
+      <p:sp>
+        <p:nvSpPr>
+          <p:cNvPr id="21" name="Rectangle 20"/>
+          <p:cNvSpPr/>
+          <p:nvPr/>
+        </p:nvSpPr>
+        <p:spPr>
+          <a:xfrm>
+            <a:off x="768096" y="3703320"/>
+            <a:ext cx="109728" cy="109728"/>
+          </a:xfrm>
+          <a:prstGeom prst="rect">
+            <a:avLst/>
+          </a:prstGeom>
+          <a:solidFill>
+            <a:srgbClr val="7C3AED"/>
+          </a:solidFill>
+          <a:ln>
+            <a:solidFill>
+              <a:srgbClr val="7C3AED"/>
+            </a:solidFill>
+          </a:ln>
+        </p:spPr>
+        <p:style>
+          <a:lnRef idx="1">
+            <a:schemeClr val="accent1"/>
+          </a:lnRef>
+          <a:fillRef idx="3">
+            <a:schemeClr val="accent1"/>
+          </a:fillRef>
+          <a:effectRef idx="2">
+            <a:schemeClr val="accent1"/>
+          </a:effectRef>
+          <a:fontRef idx="minor">
+            <a:schemeClr val="lt1"/>
+          </a:fontRef>
+        </p:style>
+        <p:txBody>
+          <a:bodyPr rtlCol="0" anchor="ctr"/>
+          <a:lstStyle/>
+          <a:p>
+            <a:pPr algn="ctr"/>
+          </a:p>
+        </p:txBody>
+      </p:sp>
+      <p:sp>
+        <p:nvSpPr>
+          <p:cNvPr id="22" name="TextBox 21"/>
+          <p:cNvSpPr txBox="1"/>
+          <p:nvPr/>
+        </p:nvSpPr>
+        <p:spPr>
+          <a:xfrm>
+            <a:off x="1051560" y="3648456"/>
+            <a:ext cx="1463040" cy="228600"/>
+          </a:xfrm>
+          <a:prstGeom prst="rect">
+            <a:avLst/>
+          </a:prstGeom>
+          <a:noFill/>
+        </p:spPr>
+        <p:txBody>
+          <a:bodyPr wrap="none">
+            <a:spAutoFit/>
+          </a:bodyPr>
+          <a:lstStyle/>
+          <a:p>
+            <a:r>
+              <a:rPr sz="1300" b="1">
+                <a:solidFill>
+                  <a:srgbClr val="7C3AED"/>
+                </a:solidFill>
+                <a:latin typeface="PingFang SC"/>
+              </a:rPr>
+              <a:t>MemPalace</a:t>
+            </a:r>
+          </a:p>
+        </p:txBody>
+      </p:sp>
+      <p:sp>
+        <p:nvSpPr>
+          <p:cNvPr id="23" name="TextBox 22"/>
+          <p:cNvSpPr txBox="1"/>
+          <p:nvPr/>
+        </p:nvSpPr>
+        <p:spPr>
+          <a:xfrm>
+            <a:off x="2468880" y="3648456"/>
+            <a:ext cx="5029200" cy="228600"/>
+          </a:xfrm>
+          <a:prstGeom prst="rect">
+            <a:avLst/>
+          </a:prstGeom>
+          <a:noFill/>
+        </p:spPr>
+        <p:txBody>
+          <a:bodyPr wrap="none">
+            <a:spAutoFit/>
+          </a:bodyPr>
+          <a:lstStyle/>
+          <a:p>
+            <a:r>
+              <a:rPr sz="1050" b="0">
+                <a:solidFill>
+                  <a:srgbClr val="334155"/>
+                </a:solidFill>
+                <a:latin typeface="PingFang SC"/>
+              </a:rPr>
+              <a:t>Memory palace / LLM Wiki reference project</a:t>
+            </a:r>
+          </a:p>
+        </p:txBody>
+      </p:sp>
+      <p:sp>
+        <p:nvSpPr>
+          <p:cNvPr id="24" name="TextBox 23"/>
+          <p:cNvSpPr txBox="1"/>
+          <p:nvPr/>
+        </p:nvSpPr>
+        <p:spPr>
+          <a:xfrm>
+            <a:off x="7543800" y="3648456"/>
+            <a:ext cx="3749039" cy="228600"/>
+          </a:xfrm>
+          <a:prstGeom prst="rect">
+            <a:avLst/>
+          </a:prstGeom>
+          <a:noFill/>
+        </p:spPr>
+        <p:txBody>
+          <a:bodyPr wrap="none">
+            <a:spAutoFit/>
+          </a:bodyPr>
+          <a:lstStyle/>
+          <a:p>
+            <a:r>
+              <a:rPr sz="880" b="0">
+                <a:solidFill>
+                  <a:srgbClr val="2563EB"/>
+                </a:solidFill>
+                <a:latin typeface="Menlo"/>
+              </a:rPr>
+              <a:t>https://github.com/mempalace/mempalace</a:t>
+            </a:r>
+          </a:p>
+        </p:txBody>
+      </p:sp>
+      <p:sp>
+        <p:nvSpPr>
+          <p:cNvPr id="25" name="Rectangle 24"/>
+          <p:cNvSpPr/>
+          <p:nvPr/>
+        </p:nvSpPr>
+        <p:spPr>
+          <a:xfrm>
+            <a:off x="768096" y="4315968"/>
+            <a:ext cx="109728" cy="109728"/>
+          </a:xfrm>
+          <a:prstGeom prst="rect">
+            <a:avLst/>
+          </a:prstGeom>
+          <a:solidFill>
+            <a:srgbClr val="B91C1C"/>
+          </a:solidFill>
+          <a:ln>
+            <a:solidFill>
+              <a:srgbClr val="B91C1C"/>
+            </a:solidFill>
+          </a:ln>
+        </p:spPr>
+        <p:style>
+          <a:lnRef idx="1">
+            <a:schemeClr val="accent1"/>
+          </a:lnRef>
+          <a:fillRef idx="3">
+            <a:schemeClr val="accent1"/>
+          </a:fillRef>
+          <a:effectRef idx="2">
+            <a:schemeClr val="accent1"/>
+          </a:effectRef>
+          <a:fontRef idx="minor">
+            <a:schemeClr val="lt1"/>
+          </a:fontRef>
+        </p:style>
+        <p:txBody>
+          <a:bodyPr rtlCol="0" anchor="ctr"/>
+          <a:lstStyle/>
+          <a:p>
+            <a:pPr algn="ctr"/>
+          </a:p>
+        </p:txBody>
+      </p:sp>
+      <p:sp>
+        <p:nvSpPr>
+          <p:cNvPr id="26" name="TextBox 25"/>
+          <p:cNvSpPr txBox="1"/>
+          <p:nvPr/>
+        </p:nvSpPr>
+        <p:spPr>
+          <a:xfrm>
+            <a:off x="1051560" y="4261104"/>
+            <a:ext cx="1463040" cy="228600"/>
+          </a:xfrm>
+          <a:prstGeom prst="rect">
+            <a:avLst/>
+          </a:prstGeom>
+          <a:noFill/>
+        </p:spPr>
+        <p:txBody>
+          <a:bodyPr wrap="none">
+            <a:spAutoFit/>
+          </a:bodyPr>
+          <a:lstStyle/>
+          <a:p>
+            <a:r>
+              <a:rPr sz="1300" b="1">
+                <a:solidFill>
+                  <a:srgbClr val="B91C1C"/>
+                </a:solidFill>
+                <a:latin typeface="PingFang SC"/>
+              </a:rPr>
+              <a:t>Hermes Agent</a:t>
+            </a:r>
+          </a:p>
+        </p:txBody>
+      </p:sp>
+      <p:sp>
+        <p:nvSpPr>
+          <p:cNvPr id="27" name="TextBox 26"/>
+          <p:cNvSpPr txBox="1"/>
+          <p:nvPr/>
+        </p:nvSpPr>
+        <p:spPr>
+          <a:xfrm>
+            <a:off x="2468880" y="4261104"/>
+            <a:ext cx="5029200" cy="228600"/>
+          </a:xfrm>
+          <a:prstGeom prst="rect">
+            <a:avLst/>
+          </a:prstGeom>
+          <a:noFill/>
+        </p:spPr>
+        <p:txBody>
+          <a:bodyPr wrap="none">
+            <a:spAutoFit/>
+          </a:bodyPr>
+          <a:lstStyle/>
+          <a:p>
+            <a:r>
+              <a:rPr sz="1050" b="0">
+                <a:solidFill>
+                  <a:srgbClr val="334155"/>
+                </a:solidFill>
+                <a:latin typeface="PingFang SC"/>
+              </a:rPr>
+              <a:t>Skills, memory, tools, and sessions for growing agents</a:t>
+            </a:r>
+          </a:p>
+        </p:txBody>
+      </p:sp>
+      <p:sp>
+        <p:nvSpPr>
+          <p:cNvPr id="28" name="TextBox 27"/>
+          <p:cNvSpPr txBox="1"/>
+          <p:nvPr/>
+        </p:nvSpPr>
+        <p:spPr>
+          <a:xfrm>
+            <a:off x="7543800" y="4261104"/>
+            <a:ext cx="3749039" cy="228600"/>
+          </a:xfrm>
+          <a:prstGeom prst="rect">
+            <a:avLst/>
+          </a:prstGeom>
+          <a:noFill/>
+        </p:spPr>
+        <p:txBody>
+          <a:bodyPr wrap="none">
+            <a:spAutoFit/>
+          </a:bodyPr>
+          <a:lstStyle/>
+          <a:p>
+            <a:r>
+              <a:rPr sz="880" b="0">
+                <a:solidFill>
+                  <a:srgbClr val="2563EB"/>
+                </a:solidFill>
+                <a:latin typeface="Menlo"/>
+              </a:rPr>
+              <a:t>https://github.com/NousResearch/hermes-agent</a:t>
+            </a:r>
+          </a:p>
+        </p:txBody>
+      </p:sp>
+      <p:sp>
+        <p:nvSpPr>
+          <p:cNvPr id="29" name="Rectangle 28"/>
+          <p:cNvSpPr/>
+          <p:nvPr/>
+        </p:nvSpPr>
+        <p:spPr>
+          <a:xfrm>
+            <a:off x="768096" y="4928616"/>
+            <a:ext cx="109728" cy="109728"/>
+          </a:xfrm>
+          <a:prstGeom prst="rect">
+            <a:avLst/>
+          </a:prstGeom>
+          <a:solidFill>
+            <a:srgbClr val="334155"/>
+          </a:solidFill>
+          <a:ln>
+            <a:solidFill>
+              <a:srgbClr val="334155"/>
+            </a:solidFill>
+          </a:ln>
+        </p:spPr>
+        <p:style>
+          <a:lnRef idx="1">
+            <a:schemeClr val="accent1"/>
+          </a:lnRef>
+          <a:fillRef idx="3">
+            <a:schemeClr val="accent1"/>
+          </a:fillRef>
+          <a:effectRef idx="2">
+            <a:schemeClr val="accent1"/>
+          </a:effectRef>
+          <a:fontRef idx="minor">
+            <a:schemeClr val="lt1"/>
+          </a:fontRef>
+        </p:style>
+        <p:txBody>
+          <a:bodyPr rtlCol="0" anchor="ctr"/>
+          <a:lstStyle/>
+          <a:p>
+            <a:pPr algn="ctr"/>
+          </a:p>
+        </p:txBody>
+      </p:sp>
+      <p:sp>
+        <p:nvSpPr>
+          <p:cNvPr id="30" name="TextBox 29"/>
+          <p:cNvSpPr txBox="1"/>
+          <p:nvPr/>
+        </p:nvSpPr>
+        <p:spPr>
+          <a:xfrm>
+            <a:off x="1051560" y="4873752"/>
+            <a:ext cx="1463040" cy="228600"/>
+          </a:xfrm>
+          <a:prstGeom prst="rect">
+            <a:avLst/>
+          </a:prstGeom>
+          <a:noFill/>
+        </p:spPr>
+        <p:txBody>
+          <a:bodyPr wrap="none">
+            <a:spAutoFit/>
+          </a:bodyPr>
+          <a:lstStyle/>
+          <a:p>
+            <a:r>
+              <a:rPr sz="1300" b="1">
+                <a:solidFill>
+                  <a:srgbClr val="334155"/>
+                </a:solidFill>
+                <a:latin typeface="PingFang SC"/>
+              </a:rPr>
+              <a:t>RTK</a:t>
+            </a:r>
+          </a:p>
+        </p:txBody>
+      </p:sp>
+      <p:sp>
+        <p:nvSpPr>
+          <p:cNvPr id="31" name="TextBox 30"/>
+          <p:cNvSpPr txBox="1"/>
+          <p:nvPr/>
+        </p:nvSpPr>
+        <p:spPr>
+          <a:xfrm>
+            <a:off x="2468880" y="4873752"/>
+            <a:ext cx="5029200" cy="228600"/>
+          </a:xfrm>
+          <a:prstGeom prst="rect">
+            <a:avLst/>
+          </a:prstGeom>
+          <a:noFill/>
+        </p:spPr>
+        <p:txBody>
+          <a:bodyPr wrap="none">
+            <a:spAutoFit/>
+          </a:bodyPr>
+          <a:lstStyle/>
+          <a:p>
+            <a:r>
+              <a:rPr sz="1050" b="0">
+                <a:solidFill>
+                  <a:srgbClr val="334155"/>
+                </a:solidFill>
+                <a:latin typeface="PingFang SC"/>
+              </a:rPr>
+              <a:t>Trace / CLI noise compression reference project</a:t>
+            </a:r>
+          </a:p>
+        </p:txBody>
+      </p:sp>
+      <p:sp>
+        <p:nvSpPr>
+          <p:cNvPr id="32" name="TextBox 31"/>
+          <p:cNvSpPr txBox="1"/>
+          <p:nvPr/>
+        </p:nvSpPr>
+        <p:spPr>
+          <a:xfrm>
+            <a:off x="7543800" y="4873752"/>
+            <a:ext cx="3749039" cy="228600"/>
+          </a:xfrm>
+          <a:prstGeom prst="rect">
+            <a:avLst/>
+          </a:prstGeom>
+          <a:noFill/>
+        </p:spPr>
+        <p:txBody>
+          <a:bodyPr wrap="none">
+            <a:spAutoFit/>
+          </a:bodyPr>
+          <a:lstStyle/>
+          <a:p>
+            <a:r>
+              <a:rPr sz="880" b="0">
+                <a:solidFill>
+                  <a:srgbClr val="2563EB"/>
+                </a:solidFill>
+                <a:latin typeface="Menlo"/>
+              </a:rPr>
+              <a:t>https://github.com/rtk-ai/rtk</a:t>
+            </a:r>
+          </a:p>
+        </p:txBody>
+      </p:sp>
+      <p:sp>
+        <p:nvSpPr>
+          <p:cNvPr id="33" name="Rectangle 32"/>
+          <p:cNvSpPr/>
+          <p:nvPr/>
+        </p:nvSpPr>
+        <p:spPr>
+          <a:xfrm>
+            <a:off x="768096" y="6199632"/>
+            <a:ext cx="10241280" cy="9144"/>
+          </a:xfrm>
+          <a:prstGeom prst="rect">
+            <a:avLst/>
+          </a:prstGeom>
+          <a:solidFill>
+            <a:srgbClr val="CBD5E1"/>
+          </a:solidFill>
+          <a:ln>
+            <a:solidFill>
+              <a:srgbClr val="CBD5E1"/>
+            </a:solidFill>
+          </a:ln>
+        </p:spPr>
+        <p:style>
+          <a:lnRef idx="1">
+            <a:schemeClr val="accent1"/>
+          </a:lnRef>
+          <a:fillRef idx="3">
+            <a:schemeClr val="accent1"/>
+          </a:fillRef>
+          <a:effectRef idx="2">
+            <a:schemeClr val="accent1"/>
+          </a:effectRef>
+          <a:fontRef idx="minor">
+            <a:schemeClr val="lt1"/>
+          </a:fontRef>
+        </p:style>
+        <p:txBody>
+          <a:bodyPr rtlCol="0" anchor="ctr"/>
+          <a:lstStyle/>
+          <a:p>
+            <a:pPr algn="ctr"/>
+          </a:p>
+        </p:txBody>
+      </p:sp>
+      <p:sp>
+        <p:nvSpPr>
+          <p:cNvPr id="34" name="TextBox 33"/>
+          <p:cNvSpPr txBox="1"/>
+          <p:nvPr/>
+        </p:nvSpPr>
+        <p:spPr>
+          <a:xfrm>
+            <a:off x="768096" y="6327648"/>
+            <a:ext cx="9875520" cy="228600"/>
+          </a:xfrm>
+          <a:prstGeom prst="rect">
+            <a:avLst/>
+          </a:prstGeom>
+          <a:noFill/>
+        </p:spPr>
+        <p:txBody>
+          <a:bodyPr wrap="none">
+            <a:spAutoFit/>
+          </a:bodyPr>
+          <a:lstStyle/>
+          <a:p>
+            <a:r>
+              <a:rPr sz="950" b="0">
+                <a:solidFill>
+                  <a:srgbClr val="64748B"/>
+                </a:solidFill>
+                <a:latin typeface="PingFang SC"/>
+              </a:rPr>
+              <a:t>Note: SkillFlow is especially relevant for separating skill usage from skill utility in lifelong evaluation.</a:t>
+            </a:r>
+          </a:p>
+        </p:txBody>
+      </p:sp>
+    </p:spTree>
+  </p:cSld>
+  <p:clrMapOvr>
+    <a:masterClrMapping/>
+  </p:clrMapOvr>
+</p:sld>
+</file>
+
 <file path=ppt/slides/slide2.xml><?xml version="1.0" encoding="utf-8"?>
 <p:sld xmlns:p="http://schemas.openxmlformats.org/presentationml/2006/main">
   <p:cSld>
